--- a/training/slides.pptx
+++ b/training/slides.pptx
@@ -5910,7 +5910,7 @@
                 </a:solidFill>
                 <a:latin typeface="Calibri"/>
               </a:rPr>
-              <a:t>14 CSV files → raw.* Delta tables.  One command, done.</a:t>
+              <a:t>14 CSV files → dream_airlines_dw.* Delta tables.  One command, done.</a:t>
             </a:r>
           </a:p>
         </p:txBody>
